--- a/CV_FROMAGER.pptx
+++ b/CV_FROMAGER.pptx
@@ -208,7 +208,7 @@
           </a:lstStyle>
           <a:p>
             <a:fld id="{6BFF9852-8A9D-FA43-9BC6-1FE6D867865C}" type="datetimeFigureOut">
-              <a:t>05/02/2020</a:t>
+              <a:t>06/02/2020</a:t>
             </a:fld>
             <a:endParaRPr lang="en-US"/>
           </a:p>
@@ -819,7 +819,7 @@
           <a:p>
             <a:fld id="{8CF0904D-930F-FD46-A326-BF7152BF9E0A}" type="datetimeFigureOut">
               <a:rPr lang="fr-FR" smtClean="0"/>
-              <a:t>05/02/2020</a:t>
+              <a:t>06/02/2020</a:t>
             </a:fld>
             <a:endParaRPr lang="fr-FR"/>
           </a:p>
@@ -987,7 +987,7 @@
           <a:p>
             <a:fld id="{8CF0904D-930F-FD46-A326-BF7152BF9E0A}" type="datetimeFigureOut">
               <a:rPr lang="fr-FR" smtClean="0"/>
-              <a:t>05/02/2020</a:t>
+              <a:t>06/02/2020</a:t>
             </a:fld>
             <a:endParaRPr lang="fr-FR"/>
           </a:p>
@@ -1165,7 +1165,7 @@
           <a:p>
             <a:fld id="{8CF0904D-930F-FD46-A326-BF7152BF9E0A}" type="datetimeFigureOut">
               <a:rPr lang="fr-FR" smtClean="0"/>
-              <a:t>05/02/2020</a:t>
+              <a:t>06/02/2020</a:t>
             </a:fld>
             <a:endParaRPr lang="fr-FR"/>
           </a:p>
@@ -1333,7 +1333,7 @@
           <a:p>
             <a:fld id="{8CF0904D-930F-FD46-A326-BF7152BF9E0A}" type="datetimeFigureOut">
               <a:rPr lang="fr-FR" smtClean="0"/>
-              <a:t>05/02/2020</a:t>
+              <a:t>06/02/2020</a:t>
             </a:fld>
             <a:endParaRPr lang="fr-FR"/>
           </a:p>
@@ -1578,7 +1578,7 @@
           <a:p>
             <a:fld id="{8CF0904D-930F-FD46-A326-BF7152BF9E0A}" type="datetimeFigureOut">
               <a:rPr lang="fr-FR" smtClean="0"/>
-              <a:t>05/02/2020</a:t>
+              <a:t>06/02/2020</a:t>
             </a:fld>
             <a:endParaRPr lang="fr-FR"/>
           </a:p>
@@ -1863,7 +1863,7 @@
           <a:p>
             <a:fld id="{8CF0904D-930F-FD46-A326-BF7152BF9E0A}" type="datetimeFigureOut">
               <a:rPr lang="fr-FR" smtClean="0"/>
-              <a:t>05/02/2020</a:t>
+              <a:t>06/02/2020</a:t>
             </a:fld>
             <a:endParaRPr lang="fr-FR"/>
           </a:p>
@@ -2287,7 +2287,7 @@
           <a:p>
             <a:fld id="{8CF0904D-930F-FD46-A326-BF7152BF9E0A}" type="datetimeFigureOut">
               <a:rPr lang="fr-FR" smtClean="0"/>
-              <a:t>05/02/2020</a:t>
+              <a:t>06/02/2020</a:t>
             </a:fld>
             <a:endParaRPr lang="fr-FR"/>
           </a:p>
@@ -2404,7 +2404,7 @@
           <a:p>
             <a:fld id="{8CF0904D-930F-FD46-A326-BF7152BF9E0A}" type="datetimeFigureOut">
               <a:rPr lang="fr-FR" smtClean="0"/>
-              <a:t>05/02/2020</a:t>
+              <a:t>06/02/2020</a:t>
             </a:fld>
             <a:endParaRPr lang="fr-FR"/>
           </a:p>
@@ -2499,7 +2499,7 @@
           <a:p>
             <a:fld id="{8CF0904D-930F-FD46-A326-BF7152BF9E0A}" type="datetimeFigureOut">
               <a:rPr lang="fr-FR" smtClean="0"/>
-              <a:t>05/02/2020</a:t>
+              <a:t>06/02/2020</a:t>
             </a:fld>
             <a:endParaRPr lang="fr-FR"/>
           </a:p>
@@ -2774,7 +2774,7 @@
           <a:p>
             <a:fld id="{8CF0904D-930F-FD46-A326-BF7152BF9E0A}" type="datetimeFigureOut">
               <a:rPr lang="fr-FR" smtClean="0"/>
-              <a:t>05/02/2020</a:t>
+              <a:t>06/02/2020</a:t>
             </a:fld>
             <a:endParaRPr lang="fr-FR"/>
           </a:p>
@@ -3026,7 +3026,7 @@
           <a:p>
             <a:fld id="{8CF0904D-930F-FD46-A326-BF7152BF9E0A}" type="datetimeFigureOut">
               <a:rPr lang="fr-FR" smtClean="0"/>
-              <a:t>05/02/2020</a:t>
+              <a:t>06/02/2020</a:t>
             </a:fld>
             <a:endParaRPr lang="fr-FR"/>
           </a:p>
@@ -3237,7 +3237,7 @@
           <a:p>
             <a:fld id="{8CF0904D-930F-FD46-A326-BF7152BF9E0A}" type="datetimeFigureOut">
               <a:rPr lang="fr-FR" smtClean="0"/>
-              <a:t>05/02/2020</a:t>
+              <a:t>06/02/2020</a:t>
             </a:fld>
             <a:endParaRPr lang="fr-FR"/>
           </a:p>
@@ -3857,7 +3857,7 @@
                   <a:schemeClr val="bg1"/>
                 </a:solidFill>
               </a:rPr>
-              <a:t>ARCHITECTE CLOUD/CHEF DE PROJETS TECHNIQUES</a:t>
+              <a:t>ARCHITECTE CLOUD</a:t>
             </a:r>
           </a:p>
           <a:p>
